--- a/public/fun/pack/pptx/familypro/가족소개프리미엄_40_반려동물과함께_모노블랙.pptx
+++ b/public/fun/pack/pptx/familypro/가족소개프리미엄_40_반려동물과함께_모노블랙.pptx
@@ -113,12 +113,12 @@
   <p:extLst>
     <p:ext uri="{521415D9-36F7-43E2-AB2F-B90AF26B5E84}">
       <p14:sectionLst xmlns:p14="http://schemas.microsoft.com/office/powerpoint/2010/main">
-        <p14:section name="시작" id="{2C27BE0D-A72B-4845-8DA0-9A825C989A45}">
+        <p14:section name="시작" id="{39963813-D96B-47C4-98FB-54F9930F3DA6}">
           <p14:sldIdLst>
             <p14:sldId id="256"/>
           </p14:sldIdLst>
         </p14:section>
-        <p14:section name="본문" id="{66FA07E3-55D0-4061-A7E2-80A8AD22FCD2}">
+        <p14:section name="본문" id="{D9F96952-0CFF-40A1-8624-F8B1D3B3300C}">
           <p14:sldIdLst>
             <p14:sldId id="257"/>
             <p14:sldId id="258"/>
@@ -127,7 +127,7 @@
             <p14:sldId id="261"/>
           </p14:sldIdLst>
         </p14:section>
-        <p14:section name="마무리" id="{4F922639-B6FD-4EB7-83D8-B1BAD7281A07}">
+        <p14:section name="마무리" id="{4266EFED-8D13-4EBF-B68E-F2F38C0E6AF4}">
           <p14:sldIdLst>
             <p14:sldId id="262"/>
           </p14:sldIdLst>
@@ -1572,7 +1572,7 @@
             </a:lvl1pPr>
           </a:lstStyle>
           <a:p>
-            <a:fld id="{15DB4589-A954-478E-A730-9253E4172D97}" type="slidenum">
+            <a:fld id="{BCB5EF0D-0941-44F1-B575-E421BA28E6F3}" type="slidenum">
               <a:rPr lang="en-US"/>
               <a:t>‹#›</a:t>
             </a:fld>
@@ -2277,7 +2277,7 @@
             </a:lvl1pPr>
           </a:lstStyle>
           <a:p>
-            <a:fld id="{CD6FF0E2-2E13-4632-9496-408AFF261D12}" type="slidenum">
+            <a:fld id="{2D961732-D3A7-446D-B2FD-444D61A882BC}" type="slidenum">
               <a:rPr lang="en-US"/>
               <a:t>‹#›</a:t>
             </a:fld>
@@ -2955,7 +2955,7 @@
             </a:lvl1pPr>
           </a:lstStyle>
           <a:p>
-            <a:fld id="{5C0D1A27-0C87-4760-BC81-71BA44435DAE}" type="slidenum">
+            <a:fld id="{F849C004-B13E-4C49-BC25-8392002B1BEF}" type="slidenum">
               <a:rPr lang="en-US"/>
               <a:t>‹#›</a:t>
             </a:fld>
@@ -3818,7 +3818,7 @@
           <a:p>
             <a:r>
               <a:rPr lang="ko-KR"/>
-              <a:t>반려동물과 함께 · 0000. 00. 00</a:t>
+              <a:t>반려동물과 함께 · 날짜 입력</a:t>
             </a:r>
           </a:p>
         </p:txBody>
@@ -4110,7 +4110,7 @@
           <a:bodyPr/>
           <a:lstStyle/>
           <a:p>
-            <a:fld id="{0B7603AA-B4DE-4FFC-BD2E-21933C62B164}" type="slidenum">
+            <a:fld id="{67AE2B0A-2A65-46F6-8EA8-0BB9DA2CE702}" type="slidenum">
               <a:rPr lang="en-US"/>
               <a:t>‹#›</a:t>
             </a:fld>
@@ -4744,7 +4744,7 @@
           <a:bodyPr/>
           <a:lstStyle/>
           <a:p>
-            <a:fld id="{EBFEE0EE-1A11-4ADA-A418-A9FB7C1B4FEF}" type="slidenum">
+            <a:fld id="{DC6D76E7-72FC-4C16-B579-E1DCAB073C4B}" type="slidenum">
               <a:rPr lang="en-US"/>
               <a:t>‹#›</a:t>
             </a:fld>
@@ -5719,7 +5719,7 @@
           <a:bodyPr/>
           <a:lstStyle/>
           <a:p>
-            <a:fld id="{401F5447-148F-4320-80C2-AD9E5EDAD00E}" type="slidenum">
+            <a:fld id="{96506A18-3121-44C4-BDA6-7523DFBC163B}" type="slidenum">
               <a:rPr lang="en-US"/>
               <a:t>‹#›</a:t>
             </a:fld>
@@ -7067,7 +7067,7 @@
           <a:bodyPr/>
           <a:lstStyle/>
           <a:p>
-            <a:fld id="{E2E56905-25E6-49F6-AD8C-FC1FA163026A}" type="slidenum">
+            <a:fld id="{A782D3F5-5098-4F56-BD74-2A29CFC986E9}" type="slidenum">
               <a:rPr lang="en-US"/>
               <a:t>‹#›</a:t>
             </a:fld>
@@ -7155,7 +7155,7 @@
           <a:bodyPr/>
           <a:lstStyle/>
           <a:p>
-            <a:fld id="{0AA00BB8-292A-4547-89A6-6544D6C8D1F8}" type="slidenum">
+            <a:fld id="{A42D1772-EE80-4B0C-9FD3-4176ABDC92C6}" type="slidenum">
               <a:rPr lang="en-US"/>
               <a:t>‹#›</a:t>
             </a:fld>
